--- a/scenarios/S05_ai_expense_automation/deliverables/경비자동화_프로세스_덱.pptx
+++ b/scenarios/S05_ai_expense_automation/deliverables/경비자동화_프로세스_덱.pptx
@@ -13,6 +13,12 @@
     <p:sldId id="261" r:id="rId12"/>
     <p:sldId id="262" r:id="rId13"/>
     <p:sldId id="263" r:id="rId14"/>
+    <p:sldId id="264" r:id="rId15"/>
+    <p:sldId id="265" r:id="rId16"/>
+    <p:sldId id="266" r:id="rId17"/>
+    <p:sldId id="267" r:id="rId18"/>
+    <p:sldId id="268" r:id="rId19"/>
+    <p:sldId id="269" r:id="rId20"/>
   </p:sldIdLst>
   <p:sldSz cx="9144000" cy="6858000" type="screen4x3"/>
   <p:notesSz cx="6858000" cy="9144000"/>
@@ -3145,6 +3151,434 @@
 </p:sld>
 </file>
 
+<file path=ppt/slides/slide10.xml><?xml version="1.0" encoding="utf-8"?>
+<p:sld xmlns:a="http://schemas.openxmlformats.org/drawingml/2006/main" xmlns:p="http://schemas.openxmlformats.org/presentationml/2006/main" xmlns:r="http://schemas.openxmlformats.org/officeDocument/2006/relationships">
+  <p:cSld>
+    <p:spTree>
+      <p:nvGrpSpPr>
+        <p:cNvPr id="1" name=""/>
+        <p:cNvGrpSpPr/>
+        <p:nvPr/>
+      </p:nvGrpSpPr>
+      <p:grpSpPr/>
+      <p:sp>
+        <p:nvSpPr>
+          <p:cNvPr id="2" name="Title 1"/>
+          <p:cNvSpPr>
+            <a:spLocks noGrp="1"/>
+          </p:cNvSpPr>
+          <p:nvPr>
+            <p:ph type="title"/>
+          </p:nvPr>
+        </p:nvSpPr>
+        <p:spPr/>
+        <p:txBody>
+          <a:bodyPr/>
+          <a:lstStyle/>
+          <a:p>
+            <a:r>
+              <a:t>변경 이력: 여비교통비 OCR·규정 준수 판단 범위</a:t>
+            </a:r>
+          </a:p>
+        </p:txBody>
+      </p:sp>
+      <p:sp>
+        <p:nvSpPr>
+          <p:cNvPr id="3" name="Content Placeholder 2"/>
+          <p:cNvSpPr>
+            <a:spLocks noGrp="1"/>
+          </p:cNvSpPr>
+          <p:nvPr>
+            <p:ph idx="1"/>
+          </p:nvPr>
+        </p:nvSpPr>
+        <p:spPr/>
+        <p:txBody>
+          <a:bodyPr/>
+          <a:lstStyle/>
+          <a:p>
+            <a:r>
+              <a:t>증빙 이미지 OCR로 금액·일자·사용처·교통수단 등 판단 필드를 추출하고 OCR별 신뢰도를 관리</a:t>
+            </a:r>
+          </a:p>
+          <a:p>
+            <a:pPr>
+              <a:defRPr sz="1400"/>
+            </a:pPr>
+            <a:r>
+              <a:t>multi-hop 규정 검색·연결 및 OCR 결과 대조를 통해 위반 여부·적용 규정·판단 근거를 산출</a:t>
+            </a:r>
+          </a:p>
+          <a:p>
+            <a:pPr>
+              <a:defRPr sz="1400"/>
+            </a:pPr>
+            <a:r>
+              <a:t>OCR 오류, 규정 해석·검색·판단 불확실성 발생 시 사람 검토로 전환</a:t>
+            </a:r>
+          </a:p>
+          <a:p>
+            <a:pPr>
+              <a:defRPr sz="1400"/>
+            </a:pPr>
+            <a:r>
+              <a:t>현재 범위는 요구사항 정의와 검토 대상 파이프라인이며 구축·운영·자동 승인/반려·비용/회계 연동은 후속 결정 사항</a:t>
+            </a:r>
+          </a:p>
+        </p:txBody>
+      </p:sp>
+    </p:spTree>
+  </p:cSld>
+  <p:clrMapOvr>
+    <a:masterClrMapping/>
+  </p:clrMapOvr>
+</p:sld>
+</file>
+
+<file path=ppt/slides/slide11.xml><?xml version="1.0" encoding="utf-8"?>
+<p:sld xmlns:a="http://schemas.openxmlformats.org/drawingml/2006/main" xmlns:p="http://schemas.openxmlformats.org/presentationml/2006/main" xmlns:r="http://schemas.openxmlformats.org/officeDocument/2006/relationships">
+  <p:cSld>
+    <p:spTree>
+      <p:nvGrpSpPr>
+        <p:cNvPr id="1" name=""/>
+        <p:cNvGrpSpPr/>
+        <p:nvPr/>
+      </p:nvGrpSpPr>
+      <p:grpSpPr/>
+      <p:sp>
+        <p:nvSpPr>
+          <p:cNvPr id="2" name="Title 1"/>
+          <p:cNvSpPr>
+            <a:spLocks noGrp="1"/>
+          </p:cNvSpPr>
+          <p:nvPr>
+            <p:ph type="title"/>
+          </p:nvPr>
+        </p:nvSpPr>
+        <p:spPr/>
+        <p:txBody>
+          <a:bodyPr/>
+          <a:lstStyle/>
+          <a:p>
+            <a:r>
+              <a:t>변경 승인 및 후속 결정 사항</a:t>
+            </a:r>
+          </a:p>
+        </p:txBody>
+      </p:sp>
+      <p:sp>
+        <p:nvSpPr>
+          <p:cNvPr id="3" name="Content Placeholder 2"/>
+          <p:cNvSpPr>
+            <a:spLocks noGrp="1"/>
+          </p:cNvSpPr>
+          <p:nvPr>
+            <p:ph idx="1"/>
+          </p:nvPr>
+        </p:nvSpPr>
+        <p:spPr/>
+        <p:txBody>
+          <a:bodyPr/>
+          <a:lstStyle/>
+          <a:p>
+            <a:r>
+              <a:t>여비교통비 증빙 OCR·규정 multi-hop 검색·근거 대조·위반 판단 요구사항과 검토 대상 파이프라인을 반영</a:t>
+            </a:r>
+          </a:p>
+          <a:p>
+            <a:pPr>
+              <a:defRPr sz="1400"/>
+            </a:pPr>
+            <a:r>
+              <a:t>OCR 필드별 신뢰도, 규정 개정·예외 조건, 감사 추적 및 사람 검토 전환 기준을 관리</a:t>
+            </a:r>
+          </a:p>
+          <a:p>
+            <a:pPr>
+              <a:defRPr sz="1400"/>
+            </a:pPr>
+            <a:r>
+              <a:t>저화질 증빙·OCR 오류·검색 실패·판단 불확실성 테스트와 보안·거버넌스 오픈 질문을 추가</a:t>
+            </a:r>
+          </a:p>
+          <a:p>
+            <a:pPr>
+              <a:defRPr sz="1400"/>
+            </a:pPr>
+            <a:r>
+              <a:t>현재 범위는 요구사항 정의와 검토 설계이며 실제 구축·운영·자동 승인/반려·비용/회계 연동은 후속 결정</a:t>
+            </a:r>
+          </a:p>
+        </p:txBody>
+      </p:sp>
+    </p:spTree>
+  </p:cSld>
+  <p:clrMapOvr>
+    <a:masterClrMapping/>
+  </p:clrMapOvr>
+</p:sld>
+</file>
+
+<file path=ppt/slides/slide12.xml><?xml version="1.0" encoding="utf-8"?>
+<p:sld xmlns:a="http://schemas.openxmlformats.org/drawingml/2006/main" xmlns:p="http://schemas.openxmlformats.org/presentationml/2006/main" xmlns:r="http://schemas.openxmlformats.org/officeDocument/2006/relationships">
+  <p:cSld>
+    <p:spTree>
+      <p:nvGrpSpPr>
+        <p:cNvPr id="1" name=""/>
+        <p:cNvGrpSpPr/>
+        <p:nvPr/>
+      </p:nvGrpSpPr>
+      <p:grpSpPr/>
+      <p:sp>
+        <p:nvSpPr>
+          <p:cNvPr id="2" name="Title 1"/>
+          <p:cNvSpPr>
+            <a:spLocks noGrp="1"/>
+          </p:cNvSpPr>
+          <p:nvPr>
+            <p:ph type="title"/>
+          </p:nvPr>
+        </p:nvSpPr>
+        <p:spPr/>
+        <p:txBody>
+          <a:bodyPr/>
+          <a:lstStyle/>
+          <a:p>
+            <a:r>
+              <a:t>변경 이력: OCR·규정 준수 판단 범위</a:t>
+            </a:r>
+          </a:p>
+        </p:txBody>
+      </p:sp>
+      <p:sp>
+        <p:nvSpPr>
+          <p:cNvPr id="3" name="Content Placeholder 2"/>
+          <p:cNvSpPr>
+            <a:spLocks noGrp="1"/>
+          </p:cNvSpPr>
+          <p:nvPr>
+            <p:ph idx="1"/>
+          </p:nvPr>
+        </p:nvSpPr>
+        <p:spPr/>
+        <p:txBody>
+          <a:bodyPr/>
+          <a:lstStyle/>
+          <a:p>
+            <a:r>
+              <a:t>증빙 입력 → OCR 추출 → 규정 조항·예외 multi-hop 탐색 → 근거 대조 → 판단·감사 추적 저장 → 필요 시 사람 검토 흐름 반영</a:t>
+            </a:r>
+          </a:p>
+          <a:p>
+            <a:pPr>
+              <a:defRPr sz="1400"/>
+            </a:pPr>
+            <a:r>
+              <a:t>OCR 오류·규정 해석 불확실성·검색 실패 시 사람 검토 전환 기준을 검토 범위에 추가</a:t>
+            </a:r>
+          </a:p>
+          <a:p>
+            <a:pPr>
+              <a:defRPr sz="1400"/>
+            </a:pPr>
+            <a:r>
+              <a:t>실제 구축·운영·자동 승인/반려·비용/회계 시스템 연동은 후속 결정 사항으로 유지</a:t>
+            </a:r>
+          </a:p>
+        </p:txBody>
+      </p:sp>
+    </p:spTree>
+  </p:cSld>
+  <p:clrMapOvr>
+    <a:masterClrMapping/>
+  </p:clrMapOvr>
+</p:sld>
+</file>
+
+<file path=ppt/slides/slide13.xml><?xml version="1.0" encoding="utf-8"?>
+<p:sld xmlns:a="http://schemas.openxmlformats.org/drawingml/2006/main" xmlns:p="http://schemas.openxmlformats.org/presentationml/2006/main" xmlns:r="http://schemas.openxmlformats.org/officeDocument/2006/relationships">
+  <p:cSld>
+    <p:spTree>
+      <p:nvGrpSpPr>
+        <p:cNvPr id="1" name=""/>
+        <p:cNvGrpSpPr/>
+        <p:nvPr/>
+      </p:nvGrpSpPr>
+      <p:grpSpPr/>
+      <p:sp>
+        <p:nvSpPr>
+          <p:cNvPr id="2" name="Title 1"/>
+          <p:cNvSpPr>
+            <a:spLocks noGrp="1"/>
+          </p:cNvSpPr>
+          <p:nvPr>
+            <p:ph type="title"/>
+          </p:nvPr>
+        </p:nvSpPr>
+        <p:spPr/>
+        <p:txBody>
+          <a:bodyPr/>
+          <a:lstStyle/>
+          <a:p>
+            <a:r>
+              <a:t>변경 범위 및 후속 결정 사항</a:t>
+            </a:r>
+          </a:p>
+        </p:txBody>
+      </p:sp>
+      <p:sp>
+        <p:nvSpPr>
+          <p:cNvPr id="3" name="Content Placeholder 2"/>
+          <p:cNvSpPr>
+            <a:spLocks noGrp="1"/>
+          </p:cNvSpPr>
+          <p:nvPr>
+            <p:ph idx="1"/>
+          </p:nvPr>
+        </p:nvSpPr>
+        <p:spPr/>
+        <p:txBody>
+          <a:bodyPr/>
+          <a:lstStyle/>
+          <a:p>
+            <a:r>
+              <a:t>비용증빙 OCR 필드·신뢰도 저장 및 불확실성 시 사람 검토 전환</a:t>
+            </a:r>
+          </a:p>
+          <a:p>
+            <a:pPr>
+              <a:defRPr sz="1400"/>
+            </a:pPr>
+            <a:r>
+              <a:t>multi-hop 규정 검색, 직급별 숙박비 상한, 국외 출장 일비 별도 표 적용</a:t>
+            </a:r>
+          </a:p>
+          <a:p>
+            <a:pPr>
+              <a:defRPr sz="1400"/>
+            </a:pPr>
+            <a:r>
+              <a:t>위반 여부·적용 규정·판단 근거 및 감사 추적 저장</a:t>
+            </a:r>
+          </a:p>
+          <a:p>
+            <a:pPr>
+              <a:defRPr sz="1400"/>
+            </a:pPr>
+            <a:r>
+              <a:t>규정 개정 이력·조직·직급·지역 범위·예외 조항 검증</a:t>
+            </a:r>
+          </a:p>
+          <a:p>
+            <a:pPr>
+              <a:defRPr sz="1400"/>
+            </a:pPr>
+            <a:r>
+              <a:t>현재 범위: 요구사항 정의 및 검토 대상 파이프라인</a:t>
+            </a:r>
+          </a:p>
+          <a:p>
+            <a:pPr>
+              <a:defRPr sz="1400"/>
+            </a:pPr>
+            <a:r>
+              <a:t>후속 결정: 실제 구축·운영, 자동 승인·반려, 비용·회계 시스템 연동</a:t>
+            </a:r>
+          </a:p>
+        </p:txBody>
+      </p:sp>
+    </p:spTree>
+  </p:cSld>
+  <p:clrMapOvr>
+    <a:masterClrMapping/>
+  </p:clrMapOvr>
+</p:sld>
+</file>
+
+<file path=ppt/slides/slide14.xml><?xml version="1.0" encoding="utf-8"?>
+<p:sld xmlns:a="http://schemas.openxmlformats.org/drawingml/2006/main" xmlns:p="http://schemas.openxmlformats.org/presentationml/2006/main" xmlns:r="http://schemas.openxmlformats.org/officeDocument/2006/relationships">
+  <p:cSld>
+    <p:spTree>
+      <p:nvGrpSpPr>
+        <p:cNvPr id="1" name=""/>
+        <p:cNvGrpSpPr/>
+        <p:nvPr/>
+      </p:nvGrpSpPr>
+      <p:grpSpPr/>
+      <p:sp>
+        <p:nvSpPr>
+          <p:cNvPr id="2" name="Title 1"/>
+          <p:cNvSpPr>
+            <a:spLocks noGrp="1"/>
+          </p:cNvSpPr>
+          <p:nvPr>
+            <p:ph type="title"/>
+          </p:nvPr>
+        </p:nvSpPr>
+        <p:spPr/>
+        <p:txBody>
+          <a:bodyPr/>
+          <a:lstStyle/>
+          <a:p>
+            <a:r>
+              <a:t>변경 이력: 여비교통비 규정 준수 자동화 요구사항 승인</a:t>
+            </a:r>
+          </a:p>
+        </p:txBody>
+      </p:sp>
+      <p:sp>
+        <p:nvSpPr>
+          <p:cNvPr id="3" name="Content Placeholder 2"/>
+          <p:cNvSpPr>
+            <a:spLocks noGrp="1"/>
+          </p:cNvSpPr>
+          <p:nvPr>
+            <p:ph idx="1"/>
+          </p:nvPr>
+        </p:nvSpPr>
+        <p:spPr/>
+        <p:txBody>
+          <a:bodyPr/>
+          <a:lstStyle/>
+          <a:p>
+            <a:r>
+              <a:t>비용증빙 OCR 필수 필드 추출 및 신뢰도 저장 요구사항 추가</a:t>
+            </a:r>
+          </a:p>
+          <a:p>
+            <a:pPr>
+              <a:defRPr sz="1400"/>
+            </a:pPr>
+            <a:r>
+              <a:t>multi-hop 규정 검색·근거 연결과 OCR 결과 대조 기반 위반 판단 정의</a:t>
+            </a:r>
+          </a:p>
+          <a:p>
+            <a:pPr>
+              <a:defRPr sz="1400"/>
+            </a:pPr>
+            <a:r>
+              <a:t>OCR 오류·저화질 증빙·규정 개정·검색 실패·판단 불확실성·사람 검토 전환 테스트 범위 추가</a:t>
+            </a:r>
+          </a:p>
+          <a:p>
+            <a:pPr>
+              <a:defRPr sz="1400"/>
+            </a:pPr>
+            <a:r>
+              <a:t>구축·운영·자동 승인/반려·비용 및 회계 시스템 연동은 후속 결정 사항으로 한정</a:t>
+            </a:r>
+          </a:p>
+        </p:txBody>
+      </p:sp>
+    </p:spTree>
+  </p:cSld>
+  <p:clrMapOvr>
+    <a:masterClrMapping/>
+  </p:clrMapOvr>
+</p:sld>
+</file>
+
 <file path=ppt/slides/slide2.xml><?xml version="1.0" encoding="utf-8"?>
 <p:sld xmlns:a="http://schemas.openxmlformats.org/drawingml/2006/main" xmlns:p="http://schemas.openxmlformats.org/presentationml/2006/main" xmlns:r="http://schemas.openxmlformats.org/officeDocument/2006/relationships">
   <p:cSld>
@@ -3638,6 +4072,98 @@
           <a:p>
             <a:r>
               <a:t>OCR 오인식 리스크 모니터링</a:t>
+            </a:r>
+          </a:p>
+        </p:txBody>
+      </p:sp>
+    </p:spTree>
+  </p:cSld>
+  <p:clrMapOvr>
+    <a:masterClrMapping/>
+  </p:clrMapOvr>
+</p:sld>
+</file>
+
+<file path=ppt/slides/slide9.xml><?xml version="1.0" encoding="utf-8"?>
+<p:sld xmlns:a="http://schemas.openxmlformats.org/drawingml/2006/main" xmlns:p="http://schemas.openxmlformats.org/presentationml/2006/main" xmlns:r="http://schemas.openxmlformats.org/officeDocument/2006/relationships">
+  <p:cSld>
+    <p:spTree>
+      <p:nvGrpSpPr>
+        <p:cNvPr id="1" name=""/>
+        <p:cNvGrpSpPr/>
+        <p:nvPr/>
+      </p:nvGrpSpPr>
+      <p:grpSpPr/>
+      <p:sp>
+        <p:nvSpPr>
+          <p:cNvPr id="2" name="Title 1"/>
+          <p:cNvSpPr>
+            <a:spLocks noGrp="1"/>
+          </p:cNvSpPr>
+          <p:nvPr>
+            <p:ph type="title"/>
+          </p:nvPr>
+        </p:nvSpPr>
+        <p:spPr/>
+        <p:txBody>
+          <a:bodyPr/>
+          <a:lstStyle/>
+          <a:p>
+            <a:r>
+              <a:t>변경 승인: 여비교통비 규정 준수 자동화 요구사항</a:t>
+            </a:r>
+          </a:p>
+        </p:txBody>
+      </p:sp>
+      <p:sp>
+        <p:nvSpPr>
+          <p:cNvPr id="3" name="Content Placeholder 2"/>
+          <p:cNvSpPr>
+            <a:spLocks noGrp="1"/>
+          </p:cNvSpPr>
+          <p:nvPr>
+            <p:ph idx="1"/>
+          </p:nvPr>
+        </p:nvSpPr>
+        <p:spPr/>
+        <p:txBody>
+          <a:bodyPr/>
+          <a:lstStyle/>
+          <a:p>
+            <a:r>
+              <a:t>비용증빙 이미지에서 금액·일자·사용처·교통수단 등 판단 필드를 OCR 추출</a:t>
+            </a:r>
+          </a:p>
+          <a:p>
+            <a:pPr>
+              <a:defRPr sz="1400"/>
+            </a:pPr>
+            <a:r>
+              <a:t>multi-hop 방식으로 규정 조항과 예외 조건을 탐색·연결</a:t>
+            </a:r>
+          </a:p>
+          <a:p>
+            <a:pPr>
+              <a:defRPr sz="1400"/>
+            </a:pPr>
+            <a:r>
+              <a:t>증빙 정보와 규정 근거를 대조해 위반 여부·적용 규정·판단 근거 산출</a:t>
+            </a:r>
+          </a:p>
+          <a:p>
+            <a:pPr>
+              <a:defRPr sz="1400"/>
+            </a:pPr>
+            <a:r>
+              <a:t>OCR 신뢰도와 규정 판단 근거를 저장하고 불확실 건은 사람 검토로 전환</a:t>
+            </a:r>
+          </a:p>
+          <a:p>
+            <a:pPr>
+              <a:defRPr sz="1400"/>
+            </a:pPr>
+            <a:r>
+              <a:t>구축 및 실행이 아닌 요구사항과 검토 대상 파이프라인 범위로 승인</a:t>
             </a:r>
           </a:p>
         </p:txBody>
